--- a/assets/powerpoints/module-n2-autobus/A1-excusez-moi-je-cherche.pptx
+++ b/assets/powerpoints/module-n2-autobus/A1-excusez-moi-je-cherche.pptx
@@ -11193,13 +11193,76 @@
               </a:lnSpc>
             </a:pPr>
             <a:r>
-              <a:rPr sz="2000" b="0" i="0">
+              <a:rPr sz="2000" b="1" i="0">
                 <a:solidFill>
                   <a:srgbClr val="4B4F52"/>
                 </a:solidFill>
                 <a:latin typeface="Verdana"/>
               </a:rPr>
-              <a:t>&lt;b&gt;à la&lt;/b&gt; bibliothèque (féminin) · &lt;b&gt;au&lt;/b&gt; parc (masculin) · &lt;b&gt;à l'&lt;/b&gt;école (voyelle). « À le » n'existe pas : les deux mots se collent toujours et donnent &lt;b&gt;au&lt;/b&gt;.</a:t>
+              <a:t>à la</a:t>
+            </a:r>
+            <a:r>
+              <a:rPr sz="2000" b="0" i="0">
+                <a:solidFill>
+                  <a:srgbClr val="4B4F52"/>
+                </a:solidFill>
+                <a:latin typeface="Verdana"/>
+              </a:rPr>
+              <a:t> bibliothèque (féminin) · </a:t>
+            </a:r>
+            <a:r>
+              <a:rPr sz="2000" b="1" i="0">
+                <a:solidFill>
+                  <a:srgbClr val="4B4F52"/>
+                </a:solidFill>
+                <a:latin typeface="Verdana"/>
+              </a:rPr>
+              <a:t>au</a:t>
+            </a:r>
+            <a:r>
+              <a:rPr sz="2000" b="0" i="0">
+                <a:solidFill>
+                  <a:srgbClr val="4B4F52"/>
+                </a:solidFill>
+                <a:latin typeface="Verdana"/>
+              </a:rPr>
+              <a:t> parc (masculin) · </a:t>
+            </a:r>
+            <a:r>
+              <a:rPr sz="2000" b="1" i="0">
+                <a:solidFill>
+                  <a:srgbClr val="4B4F52"/>
+                </a:solidFill>
+                <a:latin typeface="Verdana"/>
+              </a:rPr>
+              <a:t>à l'</a:t>
+            </a:r>
+            <a:r>
+              <a:rPr sz="2000" b="0" i="0">
+                <a:solidFill>
+                  <a:srgbClr val="4B4F52"/>
+                </a:solidFill>
+                <a:latin typeface="Verdana"/>
+              </a:rPr>
+              <a:t>école (voyelle). « À le » n'existe pas : les deux mots se collent toujours et donnent </a:t>
+            </a:r>
+            <a:r>
+              <a:rPr sz="2000" b="1" i="0">
+                <a:solidFill>
+                  <a:srgbClr val="4B4F52"/>
+                </a:solidFill>
+                <a:latin typeface="Verdana"/>
+              </a:rPr>
+              <a:t>au</a:t>
+            </a:r>
+            <a:r>
+              <a:rPr sz="2000" b="0" i="0">
+                <a:solidFill>
+                  <a:srgbClr val="4B4F52"/>
+                </a:solidFill>
+                <a:latin typeface="Verdana"/>
+              </a:rPr>
+              <a:t>.</a:t>
             </a:r>
           </a:p>
         </p:txBody>
